--- a/Smart-toys-database/Smart_Toys_Database-Slide-Presentation.pptx
+++ b/Smart-toys-database/Smart_Toys_Database-Slide-Presentation.pptx
@@ -142,6 +142,7 @@
 <p1510:revInfo xmlns:a="http://schemas.openxmlformats.org/drawingml/2006/main" xmlns:r="http://schemas.openxmlformats.org/officeDocument/2006/relationships" xmlns:p1510="http://schemas.microsoft.com/office/powerpoint/2015/10/main">
   <p1510:revLst>
     <p1510:client id="{63E717D0-A084-41EF-900F-F7D4F02FECE8}" v="18" dt="2025-08-02T20:05:34.561"/>
+    <p1510:client id="{97820FAF-2C64-453E-8794-D6F939D4F653}" v="37" dt="2025-08-02T20:32:12.713"/>
   </p1510:revLst>
 </p1510:revInfo>
 </file>
@@ -553,6 +554,91 @@
             <ac:graphicFrameMk id="5" creationId="{1E07D25B-E6AE-A62D-F8FF-1284D93D206A}"/>
           </ac:graphicFrameMkLst>
         </pc:graphicFrameChg>
+      </pc:sldChg>
+    </pc:docChg>
+  </pc:docChgLst>
+  <pc:docChgLst>
+    <pc:chgData name="Lei L" userId="fffa66e71c035d84" providerId="LiveId" clId="{97820FAF-2C64-453E-8794-D6F939D4F653}"/>
+    <pc:docChg chg="custSel modSld">
+      <pc:chgData name="Lei L" userId="fffa66e71c035d84" providerId="LiveId" clId="{97820FAF-2C64-453E-8794-D6F939D4F653}" dt="2025-08-02T20:33:26.460" v="53" actId="27636"/>
+      <pc:docMkLst>
+        <pc:docMk/>
+      </pc:docMkLst>
+      <pc:sldChg chg="modSp mod">
+        <pc:chgData name="Lei L" userId="fffa66e71c035d84" providerId="LiveId" clId="{97820FAF-2C64-453E-8794-D6F939D4F653}" dt="2025-08-02T20:33:16.527" v="51" actId="27636"/>
+        <pc:sldMkLst>
+          <pc:docMk/>
+          <pc:sldMk cId="2906152353" sldId="318"/>
+        </pc:sldMkLst>
+        <pc:spChg chg="mod">
+          <ac:chgData name="Lei L" userId="fffa66e71c035d84" providerId="LiveId" clId="{97820FAF-2C64-453E-8794-D6F939D4F653}" dt="2025-08-02T20:33:16.527" v="51" actId="27636"/>
+          <ac:spMkLst>
+            <pc:docMk/>
+            <pc:sldMk cId="2906152353" sldId="318"/>
+            <ac:spMk id="2" creationId="{CFDEBC60-AA38-5DEF-3160-0CAA68F3D28C}"/>
+          </ac:spMkLst>
+        </pc:spChg>
+      </pc:sldChg>
+      <pc:sldChg chg="addSp delSp modSp mod">
+        <pc:chgData name="Lei L" userId="fffa66e71c035d84" providerId="LiveId" clId="{97820FAF-2C64-453E-8794-D6F939D4F653}" dt="2025-08-02T20:33:09.781" v="49" actId="1076"/>
+        <pc:sldMkLst>
+          <pc:docMk/>
+          <pc:sldMk cId="3421680658" sldId="319"/>
+        </pc:sldMkLst>
+        <pc:spChg chg="add del mod">
+          <ac:chgData name="Lei L" userId="fffa66e71c035d84" providerId="LiveId" clId="{97820FAF-2C64-453E-8794-D6F939D4F653}" dt="2025-08-02T20:32:53.318" v="40" actId="478"/>
+          <ac:spMkLst>
+            <pc:docMk/>
+            <pc:sldMk cId="3421680658" sldId="319"/>
+            <ac:spMk id="3" creationId="{FB50AD88-87F2-B680-ABA7-F137CB99F864}"/>
+          </ac:spMkLst>
+        </pc:spChg>
+        <pc:spChg chg="del">
+          <ac:chgData name="Lei L" userId="fffa66e71c035d84" providerId="LiveId" clId="{97820FAF-2C64-453E-8794-D6F939D4F653}" dt="2025-08-02T20:32:45.729" v="39" actId="478"/>
+          <ac:spMkLst>
+            <pc:docMk/>
+            <pc:sldMk cId="3421680658" sldId="319"/>
+            <ac:spMk id="7" creationId="{4C0FEFBF-60FD-0161-6F6E-89EE39389CEE}"/>
+          </ac:spMkLst>
+        </pc:spChg>
+        <pc:picChg chg="mod">
+          <ac:chgData name="Lei L" userId="fffa66e71c035d84" providerId="LiveId" clId="{97820FAF-2C64-453E-8794-D6F939D4F653}" dt="2025-08-02T20:33:09.781" v="49" actId="1076"/>
+          <ac:picMkLst>
+            <pc:docMk/>
+            <pc:sldMk cId="3421680658" sldId="319"/>
+            <ac:picMk id="14" creationId="{DBCE9CAC-D34F-3EC0-77AD-46CDC94D84FF}"/>
+          </ac:picMkLst>
+        </pc:picChg>
+      </pc:sldChg>
+      <pc:sldChg chg="modSp">
+        <pc:chgData name="Lei L" userId="fffa66e71c035d84" providerId="LiveId" clId="{97820FAF-2C64-453E-8794-D6F939D4F653}" dt="2025-08-02T20:32:12.713" v="36" actId="20577"/>
+        <pc:sldMkLst>
+          <pc:docMk/>
+          <pc:sldMk cId="1607455252" sldId="321"/>
+        </pc:sldMkLst>
+        <pc:graphicFrameChg chg="mod">
+          <ac:chgData name="Lei L" userId="fffa66e71c035d84" providerId="LiveId" clId="{97820FAF-2C64-453E-8794-D6F939D4F653}" dt="2025-08-02T20:32:12.713" v="36" actId="20577"/>
+          <ac:graphicFrameMkLst>
+            <pc:docMk/>
+            <pc:sldMk cId="1607455252" sldId="321"/>
+            <ac:graphicFrameMk id="5" creationId="{83B1D126-54A5-47C3-05DF-2E9779DCB6A9}"/>
+          </ac:graphicFrameMkLst>
+        </pc:graphicFrameChg>
+      </pc:sldChg>
+      <pc:sldChg chg="modSp mod">
+        <pc:chgData name="Lei L" userId="fffa66e71c035d84" providerId="LiveId" clId="{97820FAF-2C64-453E-8794-D6F939D4F653}" dt="2025-08-02T20:33:26.460" v="53" actId="27636"/>
+        <pc:sldMkLst>
+          <pc:docMk/>
+          <pc:sldMk cId="3376340147" sldId="323"/>
+        </pc:sldMkLst>
+        <pc:spChg chg="mod">
+          <ac:chgData name="Lei L" userId="fffa66e71c035d84" providerId="LiveId" clId="{97820FAF-2C64-453E-8794-D6F939D4F653}" dt="2025-08-02T20:33:26.460" v="53" actId="27636"/>
+          <ac:spMkLst>
+            <pc:docMk/>
+            <pc:sldMk cId="3376340147" sldId="323"/>
+            <ac:spMk id="2" creationId="{F5D94678-095D-B3BE-40C4-10F25D94171A}"/>
+          </ac:spMkLst>
+        </pc:spChg>
       </pc:sldChg>
     </pc:docChg>
   </pc:docChgLst>
@@ -1310,7 +1396,7 @@
 <dgm:dataModel xmlns:dgm="http://schemas.openxmlformats.org/drawingml/2006/diagram" xmlns:a="http://schemas.openxmlformats.org/drawingml/2006/main">
   <dgm:ptLst>
     <dgm:pt modelId="{BE61164E-845B-45AC-B204-66BC9EA1D773}" type="doc">
-      <dgm:prSet loTypeId="urn:microsoft.com/office/officeart/2005/8/layout/pyramid2" loCatId="pyramid" qsTypeId="urn:microsoft.com/office/officeart/2005/8/quickstyle/simple1" qsCatId="simple" csTypeId="urn:microsoft.com/office/officeart/2005/8/colors/accent1_2" csCatId="accent1"/>
+      <dgm:prSet loTypeId="urn:microsoft.com/office/officeart/2005/8/layout/pyramid2" loCatId="pyramid" qsTypeId="urn:microsoft.com/office/officeart/2005/8/quickstyle/simple1" qsCatId="simple" csTypeId="urn:microsoft.com/office/officeart/2005/8/colors/accent1_2" csCatId="accent1" phldr="1"/>
       <dgm:spPr/>
       <dgm:t>
         <a:bodyPr/>
@@ -1472,8 +1558,8 @@
         <a:lstStyle/>
         <a:p>
           <a:r>
-            <a:rPr lang="en-US"/>
-            <a:t>Conclusion &amp; Take away</a:t>
+            <a:rPr lang="en-US" dirty="0"/>
+            <a:t>Contact information</a:t>
           </a:r>
         </a:p>
       </dgm:t>
@@ -2046,8 +2132,8 @@
             <a:buNone/>
           </a:pPr>
           <a:r>
-            <a:rPr lang="en-US" sz="1800" kern="1200"/>
-            <a:t>Conclusion &amp; Take away</a:t>
+            <a:rPr lang="en-US" sz="1800" kern="1200" dirty="0"/>
+            <a:t>Contact information</a:t>
           </a:r>
         </a:p>
       </dsp:txBody>
@@ -9544,7 +9630,7 @@
             <p:ph sz="quarter" idx="12"/>
             <p:extLst>
               <p:ext uri="{D42A27DB-BD31-4B8C-83A1-F6EECF244321}">
-                <p14:modId xmlns:p14="http://schemas.microsoft.com/office/powerpoint/2010/main" val="2163515169"/>
+                <p14:modId xmlns:p14="http://schemas.microsoft.com/office/powerpoint/2010/main" val="3429007223"/>
               </p:ext>
             </p:extLst>
           </p:nvPr>
@@ -9722,40 +9808,6 @@
           <a:chExt cx="0" cy="0"/>
         </a:xfrm>
       </p:grpSpPr>
-      <p:sp>
-        <p:nvSpPr>
-          <p:cNvPr id="7" name="Title 6">
-            <a:extLst>
-              <a:ext uri="{FF2B5EF4-FFF2-40B4-BE49-F238E27FC236}">
-                <a16:creationId xmlns:a16="http://schemas.microsoft.com/office/drawing/2014/main" id="{4C0FEFBF-60FD-0161-6F6E-89EE39389CEE}"/>
-              </a:ext>
-            </a:extLst>
-          </p:cNvPr>
-          <p:cNvSpPr>
-            <a:spLocks noGrp="1"/>
-          </p:cNvSpPr>
-          <p:nvPr>
-            <p:ph type="title"/>
-          </p:nvPr>
-        </p:nvSpPr>
-        <p:spPr>
-          <a:xfrm>
-            <a:off x="1353827" y="3508311"/>
-            <a:ext cx="9923770" cy="1438762"/>
-          </a:xfrm>
-        </p:spPr>
-        <p:txBody>
-          <a:bodyPr/>
-          <a:lstStyle/>
-          <a:p>
-            <a:r>
-              <a:rPr lang="en-US" dirty="0"/>
-              <a:t>Overcoming nervousness</a:t>
-            </a:r>
-            <a:endParaRPr lang="en-ZA" dirty="0"/>
-          </a:p>
-        </p:txBody>
-      </p:sp>
       <p:pic>
         <p:nvPicPr>
           <p:cNvPr id="14" name="Picture Placeholder 13" descr="A diagram of a server&#10;&#10;AI-generated content may be incorrect.">
@@ -9781,8 +9833,8 @@
         </p:blipFill>
         <p:spPr>
           <a:xfrm>
-            <a:off x="915984" y="415925"/>
-            <a:ext cx="10361613" cy="6026150"/>
+            <a:off x="1432007" y="798384"/>
+            <a:ext cx="9046381" cy="5261231"/>
           </a:xfrm>
         </p:spPr>
       </p:pic>
@@ -9835,12 +9887,12 @@
         <p:spPr>
           <a:xfrm>
             <a:off x="1468815" y="503852"/>
-            <a:ext cx="9150675" cy="710351"/>
+            <a:ext cx="9150675" cy="528535"/>
           </a:xfrm>
         </p:spPr>
         <p:txBody>
           <a:bodyPr>
-            <a:normAutofit/>
+            <a:normAutofit fontScale="90000"/>
           </a:bodyPr>
           <a:lstStyle/>
           <a:p>
@@ -10061,13 +10113,13 @@
         </p:nvSpPr>
         <p:spPr>
           <a:xfrm>
-            <a:off x="1468815" y="503852"/>
-            <a:ext cx="9150675" cy="710351"/>
+            <a:off x="1468815" y="503853"/>
+            <a:ext cx="9150675" cy="567864"/>
           </a:xfrm>
         </p:spPr>
         <p:txBody>
           <a:bodyPr>
-            <a:normAutofit/>
+            <a:normAutofit fontScale="90000"/>
           </a:bodyPr>
           <a:lstStyle/>
           <a:p>
@@ -11658,6 +11710,15 @@
 </file>
 
 <file path=customXml/item1.xml><?xml version="1.0" encoding="utf-8"?>
+<?mso-contentType ?>
+<FormTemplates xmlns="http://schemas.microsoft.com/sharepoint/v3/contenttype/forms">
+  <Display>DocumentLibraryForm</Display>
+  <Edit>DocumentLibraryForm</Edit>
+  <New>DocumentLibraryForm</New>
+</FormTemplates>
+</file>
+
+<file path=customXml/item2.xml><?xml version="1.0" encoding="utf-8"?>
 <p:properties xmlns:p="http://schemas.microsoft.com/office/2006/metadata/properties" xmlns:xsi="http://www.w3.org/2001/XMLSchema-instance" xmlns:pc="http://schemas.microsoft.com/office/infopath/2007/PartnerControls">
   <documentManagement>
     <_ip_UnifiedCompliancePolicyUIAction xmlns="http://schemas.microsoft.com/sharepoint/v3" xsi:nil="true"/>
@@ -11675,15 +11736,6 @@
     <MediaServiceKeyPoints xmlns="71af3243-3dd4-4a8d-8c0d-dd76da1f02a5" xsi:nil="true"/>
   </documentManagement>
 </p:properties>
-</file>
-
-<file path=customXml/item2.xml><?xml version="1.0" encoding="utf-8"?>
-<?mso-contentType ?>
-<FormTemplates xmlns="http://schemas.microsoft.com/sharepoint/v3/contenttype/forms">
-  <Display>DocumentLibraryForm</Display>
-  <Edit>DocumentLibraryForm</Edit>
-  <New>DocumentLibraryForm</New>
-</FormTemplates>
 </file>
 
 <file path=customXml/item3.xml><?xml version="1.0" encoding="utf-8"?>
@@ -11999,6 +12051,14 @@
 </file>
 
 <file path=customXml/itemProps1.xml><?xml version="1.0" encoding="utf-8"?>
+<ds:datastoreItem xmlns:ds="http://schemas.openxmlformats.org/officeDocument/2006/customXml" ds:itemID="{6DE3707C-8CAB-4302-B7E1-D32E1543E05C}">
+  <ds:schemaRefs>
+    <ds:schemaRef ds:uri="http://schemas.microsoft.com/sharepoint/v3/contenttype/forms"/>
+  </ds:schemaRefs>
+</ds:datastoreItem>
+</file>
+
+<file path=customXml/itemProps2.xml><?xml version="1.0" encoding="utf-8"?>
 <ds:datastoreItem xmlns:ds="http://schemas.openxmlformats.org/officeDocument/2006/customXml" ds:itemID="{3FDB7358-0BCB-4DEB-B717-C1D7CC555F05}">
   <ds:schemaRefs>
     <ds:schemaRef ds:uri="http://schemas.microsoft.com/office/2006/metadata/properties"/>
@@ -12006,14 +12066,6 @@
     <ds:schemaRef ds:uri="http://schemas.microsoft.com/sharepoint/v3"/>
     <ds:schemaRef ds:uri="71af3243-3dd4-4a8d-8c0d-dd76da1f02a5"/>
     <ds:schemaRef ds:uri="230e9df3-be65-4c73-a93b-d1236ebd677e"/>
-  </ds:schemaRefs>
-</ds:datastoreItem>
-</file>
-
-<file path=customXml/itemProps2.xml><?xml version="1.0" encoding="utf-8"?>
-<ds:datastoreItem xmlns:ds="http://schemas.openxmlformats.org/officeDocument/2006/customXml" ds:itemID="{6DE3707C-8CAB-4302-B7E1-D32E1543E05C}">
-  <ds:schemaRefs>
-    <ds:schemaRef ds:uri="http://schemas.microsoft.com/sharepoint/v3/contenttype/forms"/>
   </ds:schemaRefs>
 </ds:datastoreItem>
 </file>

--- a/Smart-toys-database/Smart_Toys_Database-Slide-Presentation.pptx
+++ b/Smart-toys-database/Smart_Toys_Database-Slide-Presentation.pptx
@@ -560,18 +560,18 @@
   <pc:docChgLst>
     <pc:chgData name="Lei L" userId="fffa66e71c035d84" providerId="LiveId" clId="{97820FAF-2C64-453E-8794-D6F939D4F653}"/>
     <pc:docChg chg="custSel modSld">
-      <pc:chgData name="Lei L" userId="fffa66e71c035d84" providerId="LiveId" clId="{97820FAF-2C64-453E-8794-D6F939D4F653}" dt="2025-08-02T20:33:26.460" v="53" actId="27636"/>
+      <pc:chgData name="Lei L" userId="fffa66e71c035d84" providerId="LiveId" clId="{97820FAF-2C64-453E-8794-D6F939D4F653}" dt="2025-08-03T16:53:22.964" v="57" actId="20577"/>
       <pc:docMkLst>
         <pc:docMk/>
       </pc:docMkLst>
       <pc:sldChg chg="modSp mod">
-        <pc:chgData name="Lei L" userId="fffa66e71c035d84" providerId="LiveId" clId="{97820FAF-2C64-453E-8794-D6F939D4F653}" dt="2025-08-02T20:33:16.527" v="51" actId="27636"/>
+        <pc:chgData name="Lei L" userId="fffa66e71c035d84" providerId="LiveId" clId="{97820FAF-2C64-453E-8794-D6F939D4F653}" dt="2025-08-03T16:53:12.314" v="55" actId="20577"/>
         <pc:sldMkLst>
           <pc:docMk/>
           <pc:sldMk cId="2906152353" sldId="318"/>
         </pc:sldMkLst>
         <pc:spChg chg="mod">
-          <ac:chgData name="Lei L" userId="fffa66e71c035d84" providerId="LiveId" clId="{97820FAF-2C64-453E-8794-D6F939D4F653}" dt="2025-08-02T20:33:16.527" v="51" actId="27636"/>
+          <ac:chgData name="Lei L" userId="fffa66e71c035d84" providerId="LiveId" clId="{97820FAF-2C64-453E-8794-D6F939D4F653}" dt="2025-08-03T16:53:12.314" v="55" actId="20577"/>
           <ac:spMkLst>
             <pc:docMk/>
             <pc:sldMk cId="2906152353" sldId="318"/>
@@ -637,6 +637,21 @@
             <pc:docMk/>
             <pc:sldMk cId="3376340147" sldId="323"/>
             <ac:spMk id="2" creationId="{F5D94678-095D-B3BE-40C4-10F25D94171A}"/>
+          </ac:spMkLst>
+        </pc:spChg>
+      </pc:sldChg>
+      <pc:sldChg chg="modSp mod">
+        <pc:chgData name="Lei L" userId="fffa66e71c035d84" providerId="LiveId" clId="{97820FAF-2C64-453E-8794-D6F939D4F653}" dt="2025-08-03T16:53:22.964" v="57" actId="20577"/>
+        <pc:sldMkLst>
+          <pc:docMk/>
+          <pc:sldMk cId="2032223509" sldId="325"/>
+        </pc:sldMkLst>
+        <pc:spChg chg="mod">
+          <ac:chgData name="Lei L" userId="fffa66e71c035d84" providerId="LiveId" clId="{97820FAF-2C64-453E-8794-D6F939D4F653}" dt="2025-08-03T16:53:22.964" v="57" actId="20577"/>
+          <ac:spMkLst>
+            <pc:docMk/>
+            <pc:sldMk cId="2032223509" sldId="325"/>
+            <ac:spMk id="2" creationId="{7B2E6944-091D-496A-6A24-3DD8FCEE2992}"/>
           </ac:spMkLst>
         </pc:spChg>
       </pc:sldChg>
@@ -3403,7 +3418,7 @@
           <a:p>
             <a:fld id="{4BE6205E-B305-4B90-9534-3C5E99A0275E}" type="datetimeFigureOut">
               <a:rPr lang="en-US" smtClean="0"/>
-              <a:t>8/2/2025</a:t>
+              <a:t>8/3/2025</a:t>
             </a:fld>
             <a:endParaRPr lang="en-US" dirty="0"/>
           </a:p>
@@ -3580,7 +3595,7 @@
           <a:p>
             <a:fld id="{233722F1-E430-42A1-A473-1759336AECCE}" type="datetimeFigureOut">
               <a:rPr lang="en-US" smtClean="0"/>
-              <a:t>8/2/2025</a:t>
+              <a:t>8/3/2025</a:t>
             </a:fld>
             <a:endParaRPr lang="en-US" dirty="0"/>
           </a:p>
@@ -9898,7 +9913,7 @@
           <a:p>
             <a:r>
               <a:rPr lang="en-US" sz="2000" dirty="0"/>
-              <a:t>Question1: who are the top 3 salesperson with sales_id? What is their total sales and corresponding sales rank?</a:t>
+              <a:t>Question1: Who are the top 3 salesperson with sales_id? What is their total sales and corresponding sales rank?</a:t>
             </a:r>
             <a:endParaRPr lang="en-ZA" sz="2000" dirty="0"/>
           </a:p>
@@ -10546,7 +10561,15 @@
           <a:p>
             <a:r>
               <a:rPr lang="en-US" sz="2000" dirty="0"/>
-              <a:t>Question 4: what are the total sales by month and show it in a line graph.</a:t>
+              <a:t>Question 4</a:t>
+            </a:r>
+            <a:r>
+              <a:rPr lang="en-US" sz="2000"/>
+              <a:t>: What </a:t>
+            </a:r>
+            <a:r>
+              <a:rPr lang="en-US" sz="2000" dirty="0"/>
+              <a:t>are the total sales by month and show it in a line graph.</a:t>
             </a:r>
           </a:p>
         </p:txBody>
@@ -11710,15 +11733,6 @@
 </file>
 
 <file path=customXml/item1.xml><?xml version="1.0" encoding="utf-8"?>
-<?mso-contentType ?>
-<FormTemplates xmlns="http://schemas.microsoft.com/sharepoint/v3/contenttype/forms">
-  <Display>DocumentLibraryForm</Display>
-  <Edit>DocumentLibraryForm</Edit>
-  <New>DocumentLibraryForm</New>
-</FormTemplates>
-</file>
-
-<file path=customXml/item2.xml><?xml version="1.0" encoding="utf-8"?>
 <p:properties xmlns:p="http://schemas.microsoft.com/office/2006/metadata/properties" xmlns:xsi="http://www.w3.org/2001/XMLSchema-instance" xmlns:pc="http://schemas.microsoft.com/office/infopath/2007/PartnerControls">
   <documentManagement>
     <_ip_UnifiedCompliancePolicyUIAction xmlns="http://schemas.microsoft.com/sharepoint/v3" xsi:nil="true"/>
@@ -11736,6 +11750,15 @@
     <MediaServiceKeyPoints xmlns="71af3243-3dd4-4a8d-8c0d-dd76da1f02a5" xsi:nil="true"/>
   </documentManagement>
 </p:properties>
+</file>
+
+<file path=customXml/item2.xml><?xml version="1.0" encoding="utf-8"?>
+<?mso-contentType ?>
+<FormTemplates xmlns="http://schemas.microsoft.com/sharepoint/v3/contenttype/forms">
+  <Display>DocumentLibraryForm</Display>
+  <Edit>DocumentLibraryForm</Edit>
+  <New>DocumentLibraryForm</New>
+</FormTemplates>
 </file>
 
 <file path=customXml/item3.xml><?xml version="1.0" encoding="utf-8"?>
@@ -12051,14 +12074,6 @@
 </file>
 
 <file path=customXml/itemProps1.xml><?xml version="1.0" encoding="utf-8"?>
-<ds:datastoreItem xmlns:ds="http://schemas.openxmlformats.org/officeDocument/2006/customXml" ds:itemID="{6DE3707C-8CAB-4302-B7E1-D32E1543E05C}">
-  <ds:schemaRefs>
-    <ds:schemaRef ds:uri="http://schemas.microsoft.com/sharepoint/v3/contenttype/forms"/>
-  </ds:schemaRefs>
-</ds:datastoreItem>
-</file>
-
-<file path=customXml/itemProps2.xml><?xml version="1.0" encoding="utf-8"?>
 <ds:datastoreItem xmlns:ds="http://schemas.openxmlformats.org/officeDocument/2006/customXml" ds:itemID="{3FDB7358-0BCB-4DEB-B717-C1D7CC555F05}">
   <ds:schemaRefs>
     <ds:schemaRef ds:uri="http://schemas.microsoft.com/office/2006/metadata/properties"/>
@@ -12066,6 +12081,14 @@
     <ds:schemaRef ds:uri="http://schemas.microsoft.com/sharepoint/v3"/>
     <ds:schemaRef ds:uri="71af3243-3dd4-4a8d-8c0d-dd76da1f02a5"/>
     <ds:schemaRef ds:uri="230e9df3-be65-4c73-a93b-d1236ebd677e"/>
+  </ds:schemaRefs>
+</ds:datastoreItem>
+</file>
+
+<file path=customXml/itemProps2.xml><?xml version="1.0" encoding="utf-8"?>
+<ds:datastoreItem xmlns:ds="http://schemas.openxmlformats.org/officeDocument/2006/customXml" ds:itemID="{6DE3707C-8CAB-4302-B7E1-D32E1543E05C}">
+  <ds:schemaRefs>
+    <ds:schemaRef ds:uri="http://schemas.microsoft.com/sharepoint/v3/contenttype/forms"/>
   </ds:schemaRefs>
 </ds:datastoreItem>
 </file>
